--- a/Baird-Service-Presentacion.pptx
+++ b/Baird-Service-Presentacion.pptx
@@ -18,10 +18,9 @@
     <p:sldId id="266" r:id="rId12"/>
     <p:sldId id="267" r:id="rId13"/>
     <p:sldId id="268" r:id="rId14"/>
-    <p:sldId id="269" r:id="rId15"/>
   </p:sldIdLst>
   <p:notesMasterIdLst>
-    <p:notesMasterId r:id="rId16"/>
+    <p:notesMasterId r:id="rId15"/>
   </p:notesMasterIdLst>
   <p:sldSz cx="9144000" cy="5143500"/>
   <p:notesSz cx="5143500" cy="9144000"/>
@@ -891,94 +890,6 @@
             <a:fld id="{F7021451-1387-4CA6-816F-3879F97B5CBC}" type="slidenum">
               <a:rPr lang="en-US"/>
               <a:t>13</a:t>
-            </a:fld>
-            <a:endParaRPr lang="en-US"/>
-          </a:p>
-        </p:txBody>
-      </p:sp>
-    </p:spTree>
-    <p:extLst>
-      <p:ext uri="{BB962C8B-B14F-4D97-AF65-F5344CB8AC3E}">
-        <p14:creationId xmlns:p14="http://schemas.microsoft.com/office/powerpoint/2010/main" val="1024086991"/>
-      </p:ext>
-    </p:extLst>
-  </p:cSld>
-  <p:clrMapOvr>
-    <a:masterClrMapping/>
-  </p:clrMapOvr>
-</p:notes>
-</file>
-
-<file path=ppt/notesSlides/notesSlide14.xml><?xml version="1.0" encoding="utf-8"?>
-<p:notes xmlns:a="http://schemas.openxmlformats.org/drawingml/2006/main" xmlns:r="http://schemas.openxmlformats.org/officeDocument/2006/relationships" xmlns:p="http://schemas.openxmlformats.org/presentationml/2006/main">
-  <p:cSld>
-    <p:spTree>
-      <p:nvGrpSpPr>
-        <p:cNvPr id="1" name=""/>
-        <p:cNvGrpSpPr/>
-        <p:nvPr/>
-      </p:nvGrpSpPr>
-      <p:grpSpPr>
-        <a:xfrm>
-          <a:off x="0" y="0"/>
-          <a:ext cx="0" cy="0"/>
-          <a:chOff x="0" y="0"/>
-          <a:chExt cx="0" cy="0"/>
-        </a:xfrm>
-      </p:grpSpPr>
-      <p:sp>
-        <p:nvSpPr>
-          <p:cNvPr id="2" name="Slide Image Placeholder 1"/>
-          <p:cNvSpPr>
-            <a:spLocks noGrp="1" noRot="1" noChangeAspect="1"/>
-          </p:cNvSpPr>
-          <p:nvPr>
-            <p:ph type="sldImg"/>
-          </p:nvPr>
-        </p:nvSpPr>
-        <p:spPr/>
-      </p:sp>
-      <p:sp>
-        <p:nvSpPr>
-          <p:cNvPr id="3" name="Notes Placeholder 2"/>
-          <p:cNvSpPr>
-            <a:spLocks noGrp="1"/>
-          </p:cNvSpPr>
-          <p:nvPr>
-            <p:ph type="body" idx="1"/>
-          </p:nvPr>
-        </p:nvSpPr>
-        <p:spPr/>
-        <p:txBody>
-          <a:bodyPr/>
-          <a:lstStyle/>
-          <a:p>
-            <a:r>
-              <a:rPr lang="en-US" dirty="0"/>
-              <a:t/>
-            </a:r>
-            <a:endParaRPr lang="en-US" dirty="0"/>
-          </a:p>
-        </p:txBody>
-      </p:sp>
-      <p:sp>
-        <p:nvSpPr>
-          <p:cNvPr id="4" name="Slide Number Placeholder 3"/>
-          <p:cNvSpPr>
-            <a:spLocks noGrp="1"/>
-          </p:cNvSpPr>
-          <p:nvPr>
-            <p:ph type="sldNum" sz="quarter" idx="10"/>
-          </p:nvPr>
-        </p:nvSpPr>
-        <p:spPr/>
-        <p:txBody>
-          <a:bodyPr/>
-          <a:lstStyle/>
-          <a:p>
-            <a:fld id="{F7021451-1387-4CA6-816F-3879F97B5CBC}" type="slidenum">
-              <a:rPr lang="en-US"/>
-              <a:t>14</a:t>
             </a:fld>
             <a:endParaRPr lang="en-US"/>
           </a:p>
@@ -2465,7 +2376,7 @@
                 <a:ea typeface="Calibri" pitchFamily="34" charset="-122"/>
                 <a:cs typeface="Calibri" pitchFamily="34" charset="-120"/>
               </a:rPr>
-              <a:t>Total cliente  =  Costo técnico  ×  1.19</a:t>
+              <a:t>Total cliente  =  Costo técnico  ×  1.13</a:t>
             </a:r>
             <a:pPr indent="0" marL="0">
               <a:buNone/>
@@ -2479,6 +2390,34 @@
                 <a:ea typeface="Calibri" pitchFamily="34" charset="-122"/>
                 <a:cs typeface="Calibri" pitchFamily="34" charset="-120"/>
               </a:rPr>
+              <a:t>  (utilidad Baird)</a:t>
+            </a:r>
+            <a:pPr indent="0" marL="0">
+              <a:buNone/>
+            </a:pPr>
+            <a:r>
+              <a:rPr lang="en-US" sz="1900" b="1" dirty="0">
+                <a:solidFill>
+                  <a:srgbClr val="FFFFFF"/>
+                </a:solidFill>
+                <a:latin typeface="Calibri" pitchFamily="34" charset="0"/>
+                <a:ea typeface="Calibri" pitchFamily="34" charset="-122"/>
+                <a:cs typeface="Calibri" pitchFamily="34" charset="-120"/>
+              </a:rPr>
+              <a:t>  ×  1.19</a:t>
+            </a:r>
+            <a:pPr indent="0" marL="0">
+              <a:buNone/>
+            </a:pPr>
+            <a:r>
+              <a:rPr lang="en-US" sz="1300" dirty="0">
+                <a:solidFill>
+                  <a:srgbClr val="8FB3B9"/>
+                </a:solidFill>
+                <a:latin typeface="Calibri" pitchFamily="34" charset="0"/>
+                <a:ea typeface="Calibri" pitchFamily="34" charset="-122"/>
+                <a:cs typeface="Calibri" pitchFamily="34" charset="-120"/>
+              </a:rPr>
               <a:t>  (IVA)</a:t>
             </a:r>
             <a:pPr indent="0" marL="0">
@@ -2487,41 +2426,13 @@
             <a:r>
               <a:rPr lang="en-US" sz="1900" b="1" dirty="0">
                 <a:solidFill>
-                  <a:srgbClr val="FFFFFF"/>
-                </a:solidFill>
-                <a:latin typeface="Calibri" pitchFamily="34" charset="0"/>
-                <a:ea typeface="Calibri" pitchFamily="34" charset="-122"/>
-                <a:cs typeface="Calibri" pitchFamily="34" charset="-120"/>
-              </a:rPr>
-              <a:t>  ×  1.10</a:t>
-            </a:r>
-            <a:pPr indent="0" marL="0">
-              <a:buNone/>
-            </a:pPr>
-            <a:r>
-              <a:rPr lang="en-US" sz="1300" dirty="0">
-                <a:solidFill>
-                  <a:srgbClr val="8FB3B9"/>
-                </a:solidFill>
-                <a:latin typeface="Calibri" pitchFamily="34" charset="0"/>
-                <a:ea typeface="Calibri" pitchFamily="34" charset="-122"/>
-                <a:cs typeface="Calibri" pitchFamily="34" charset="-120"/>
-              </a:rPr>
-              <a:t>  (margen Baird)</a:t>
-            </a:r>
-            <a:pPr indent="0" marL="0">
-              <a:buNone/>
-            </a:pPr>
-            <a:r>
-              <a:rPr lang="en-US" sz="1900" b="1" dirty="0">
-                <a:solidFill>
                   <a:srgbClr val="F59E0B"/>
                 </a:solidFill>
                 <a:latin typeface="Calibri" pitchFamily="34" charset="0"/>
                 <a:ea typeface="Calibri" pitchFamily="34" charset="-122"/>
                 <a:cs typeface="Calibri" pitchFamily="34" charset="-120"/>
               </a:rPr>
-              <a:t>   =   × 1.309</a:t>
+              <a:t>   =   × 1.3447</a:t>
             </a:r>
             <a:endParaRPr lang="en-US" sz="1900" dirty="0"/>
           </a:p>
@@ -2535,12 +2446,12 @@
         </p:nvSpPr>
         <p:spPr>
           <a:xfrm>
-            <a:off x="457200" y="2331720"/>
-            <a:ext cx="2697480" cy="1691640"/>
+            <a:off x="457200" y="2286000"/>
+            <a:ext cx="2697480" cy="1783080"/>
           </a:xfrm>
           <a:prstGeom prst="roundRect">
             <a:avLst>
-              <a:gd name="adj" fmla="val 3784"/>
+              <a:gd name="adj" fmla="val 3590"/>
             </a:avLst>
           </a:prstGeom>
           <a:solidFill>
@@ -2569,7 +2480,7 @@
         </p:nvSpPr>
         <p:spPr>
           <a:xfrm>
-            <a:off x="640080" y="2468880"/>
+            <a:off x="640080" y="2414016"/>
             <a:ext cx="2331720" cy="274320"/>
           </a:xfrm>
           <a:prstGeom prst="rect">
@@ -2608,8 +2519,8 @@
         </p:nvSpPr>
         <p:spPr>
           <a:xfrm>
-            <a:off x="640080" y="2752344"/>
-            <a:ext cx="2331720" cy="411480"/>
+            <a:off x="640080" y="2688336"/>
+            <a:ext cx="2331720" cy="384048"/>
           </a:xfrm>
           <a:prstGeom prst="rect">
             <a:avLst/>
@@ -2625,7 +2536,7 @@
               <a:buNone/>
             </a:pPr>
             <a:r>
-              <a:rPr lang="en-US" sz="1900" b="1" dirty="0">
+              <a:rPr lang="en-US" sz="1800" b="1" dirty="0">
                 <a:solidFill>
                   <a:srgbClr val="0B5563"/>
                 </a:solidFill>
@@ -2635,7 +2546,7 @@
               </a:rPr>
               <a:t>$84.000</a:t>
             </a:r>
-            <a:endParaRPr lang="en-US" sz="1900" dirty="0"/>
+            <a:endParaRPr lang="en-US" sz="1800" dirty="0"/>
           </a:p>
         </p:txBody>
       </p:sp>
@@ -2647,8 +2558,47 @@
         </p:nvSpPr>
         <p:spPr>
           <a:xfrm>
-            <a:off x="640080" y="3200400"/>
-            <a:ext cx="2331720" cy="731520"/>
+            <a:off x="640080" y="3090672"/>
+            <a:ext cx="2331720" cy="256032"/>
+          </a:xfrm>
+          <a:prstGeom prst="rect">
+            <a:avLst/>
+          </a:prstGeom>
+          <a:noFill/>
+          <a:ln/>
+        </p:spPr>
+        <p:txBody>
+          <a:bodyPr wrap="square" lIns="0" tIns="0" rIns="0" bIns="0" rtlCol="0" anchor="ctr"/>
+          <a:lstStyle/>
+          <a:p>
+            <a:pPr indent="0" marL="0">
+              <a:buNone/>
+            </a:pPr>
+            <a:r>
+              <a:rPr lang="en-US" sz="1100" b="1" dirty="0">
+                <a:solidFill>
+                  <a:srgbClr val="1E7A46"/>
+                </a:solidFill>
+                <a:latin typeface="Calibri" pitchFamily="34" charset="0"/>
+                <a:ea typeface="Calibri" pitchFamily="34" charset="-122"/>
+                <a:cs typeface="Calibri" pitchFamily="34" charset="-120"/>
+              </a:rPr>
+              <a:t>Técnico recibe: $35.000 fijo</a:t>
+            </a:r>
+            <a:endParaRPr lang="en-US" sz="1100" dirty="0"/>
+          </a:p>
+        </p:txBody>
+      </p:sp>
+      <p:sp>
+        <p:nvSpPr>
+          <p:cNvPr id="10" name="Text 8"/>
+          <p:cNvSpPr/>
+          <p:nvPr/>
+        </p:nvSpPr>
+        <p:spPr>
+          <a:xfrm>
+            <a:off x="640080" y="3383280"/>
+            <a:ext cx="2331720" cy="621792"/>
           </a:xfrm>
           <a:prstGeom prst="rect">
             <a:avLst/>
@@ -2672,7 +2622,7 @@
                 <a:ea typeface="Calibri" pitchFamily="34" charset="-122"/>
                 <a:cs typeface="Calibri" pitchFamily="34" charset="-120"/>
               </a:rPr>
-              <a:t>Anticipo 50% ($42.000) antes de la visita; se acredita si aprueba la reparación. Neto técnico: $64.171.</a:t>
+              <a:t>Anticipo 50% ($42.000) antes de la visita; se acredita si el cliente aprueba la reparación.</a:t>
             </a:r>
             <a:endParaRPr lang="en-US" sz="950" dirty="0"/>
           </a:p>
@@ -2680,18 +2630,18 @@
       </p:sp>
       <p:sp>
         <p:nvSpPr>
-          <p:cNvPr id="10" name="Shape 8"/>
-          <p:cNvSpPr/>
-          <p:nvPr/>
-        </p:nvSpPr>
-        <p:spPr>
-          <a:xfrm>
-            <a:off x="3355848" y="2331720"/>
-            <a:ext cx="2697480" cy="1691640"/>
+          <p:cNvPr id="11" name="Shape 9"/>
+          <p:cNvSpPr/>
+          <p:nvPr/>
+        </p:nvSpPr>
+        <p:spPr>
+          <a:xfrm>
+            <a:off x="3355848" y="2286000"/>
+            <a:ext cx="2697480" cy="1783080"/>
           </a:xfrm>
           <a:prstGeom prst="roundRect">
             <a:avLst>
-              <a:gd name="adj" fmla="val 3784"/>
+              <a:gd name="adj" fmla="val 3590"/>
             </a:avLst>
           </a:prstGeom>
           <a:solidFill>
@@ -2714,13 +2664,13 @@
       </p:sp>
       <p:sp>
         <p:nvSpPr>
-          <p:cNvPr id="11" name="Text 9"/>
-          <p:cNvSpPr/>
-          <p:nvPr/>
-        </p:nvSpPr>
-        <p:spPr>
-          <a:xfrm>
-            <a:off x="3538728" y="2468880"/>
+          <p:cNvPr id="12" name="Text 10"/>
+          <p:cNvSpPr/>
+          <p:nvPr/>
+        </p:nvSpPr>
+        <p:spPr>
+          <a:xfrm>
+            <a:off x="3538728" y="2414016"/>
             <a:ext cx="2331720" cy="274320"/>
           </a:xfrm>
           <a:prstGeom prst="rect">
@@ -2753,14 +2703,14 @@
       </p:sp>
       <p:sp>
         <p:nvSpPr>
-          <p:cNvPr id="12" name="Text 10"/>
-          <p:cNvSpPr/>
-          <p:nvPr/>
-        </p:nvSpPr>
-        <p:spPr>
-          <a:xfrm>
-            <a:off x="3538728" y="2752344"/>
-            <a:ext cx="2331720" cy="411480"/>
+          <p:cNvPr id="13" name="Text 11"/>
+          <p:cNvSpPr/>
+          <p:nvPr/>
+        </p:nvSpPr>
+        <p:spPr>
+          <a:xfrm>
+            <a:off x="3538728" y="2688336"/>
+            <a:ext cx="2331720" cy="384048"/>
           </a:xfrm>
           <a:prstGeom prst="rect">
             <a:avLst/>
@@ -2776,7 +2726,7 @@
               <a:buNone/>
             </a:pPr>
             <a:r>
-              <a:rPr lang="en-US" sz="1900" b="1" dirty="0">
+              <a:rPr lang="en-US" sz="1800" b="1" dirty="0">
                 <a:solidFill>
                   <a:srgbClr val="0B5563"/>
                 </a:solidFill>
@@ -2786,20 +2736,59 @@
               </a:rPr>
               <a:t>$105.000 – $189.000</a:t>
             </a:r>
-            <a:endParaRPr lang="en-US" sz="1900" dirty="0"/>
-          </a:p>
-        </p:txBody>
-      </p:sp>
-      <p:sp>
-        <p:nvSpPr>
-          <p:cNvPr id="13" name="Text 11"/>
-          <p:cNvSpPr/>
-          <p:nvPr/>
-        </p:nvSpPr>
-        <p:spPr>
-          <a:xfrm>
-            <a:off x="3538728" y="3200400"/>
-            <a:ext cx="2331720" cy="731520"/>
+            <a:endParaRPr lang="en-US" sz="1800" dirty="0"/>
+          </a:p>
+        </p:txBody>
+      </p:sp>
+      <p:sp>
+        <p:nvSpPr>
+          <p:cNvPr id="14" name="Text 12"/>
+          <p:cNvSpPr/>
+          <p:nvPr/>
+        </p:nvSpPr>
+        <p:spPr>
+          <a:xfrm>
+            <a:off x="3538728" y="3090672"/>
+            <a:ext cx="2331720" cy="256032"/>
+          </a:xfrm>
+          <a:prstGeom prst="rect">
+            <a:avLst/>
+          </a:prstGeom>
+          <a:noFill/>
+          <a:ln/>
+        </p:spPr>
+        <p:txBody>
+          <a:bodyPr wrap="square" lIns="0" tIns="0" rIns="0" bIns="0" rtlCol="0" anchor="ctr"/>
+          <a:lstStyle/>
+          <a:p>
+            <a:pPr indent="0" marL="0">
+              <a:buNone/>
+            </a:pPr>
+            <a:r>
+              <a:rPr lang="en-US" sz="1100" b="1" dirty="0">
+                <a:solidFill>
+                  <a:srgbClr val="1E7A46"/>
+                </a:solidFill>
+                <a:latin typeface="Calibri" pitchFamily="34" charset="0"/>
+                <a:ea typeface="Calibri" pitchFamily="34" charset="-122"/>
+                <a:cs typeface="Calibri" pitchFamily="34" charset="-120"/>
+              </a:rPr>
+              <a:t>Técnico: $78.084 – $140.552</a:t>
+            </a:r>
+            <a:endParaRPr lang="en-US" sz="1100" dirty="0"/>
+          </a:p>
+        </p:txBody>
+      </p:sp>
+      <p:sp>
+        <p:nvSpPr>
+          <p:cNvPr id="15" name="Text 13"/>
+          <p:cNvSpPr/>
+          <p:nvPr/>
+        </p:nvSpPr>
+        <p:spPr>
+          <a:xfrm>
+            <a:off x="3538728" y="3383280"/>
+            <a:ext cx="2331720" cy="621792"/>
           </a:xfrm>
           <a:prstGeom prst="rect">
             <a:avLst/>
@@ -2823,7 +2812,7 @@
                 <a:ea typeface="Calibri" pitchFamily="34" charset="-122"/>
                 <a:cs typeface="Calibri" pitchFamily="34" charset="-120"/>
               </a:rPr>
-              <a:t>Según tipo de equipo, precio fijo de catálogo al solicitar. Neto técnico: $80.214 – $144.385.</a:t>
+              <a:t>Precio fijo de catálogo según tipo de equipo, visible al solicitar. Neto = catálogo ÷ 1.3447.</a:t>
             </a:r>
             <a:endParaRPr lang="en-US" sz="950" dirty="0"/>
           </a:p>
@@ -2831,18 +2820,18 @@
       </p:sp>
       <p:sp>
         <p:nvSpPr>
-          <p:cNvPr id="14" name="Shape 12"/>
-          <p:cNvSpPr/>
-          <p:nvPr/>
-        </p:nvSpPr>
-        <p:spPr>
-          <a:xfrm>
-            <a:off x="6254496" y="2331720"/>
-            <a:ext cx="2697480" cy="1691640"/>
+          <p:cNvPr id="16" name="Shape 14"/>
+          <p:cNvSpPr/>
+          <p:nvPr/>
+        </p:nvSpPr>
+        <p:spPr>
+          <a:xfrm>
+            <a:off x="6254496" y="2286000"/>
+            <a:ext cx="2697480" cy="1783080"/>
           </a:xfrm>
           <a:prstGeom prst="roundRect">
             <a:avLst>
-              <a:gd name="adj" fmla="val 3784"/>
+              <a:gd name="adj" fmla="val 3590"/>
             </a:avLst>
           </a:prstGeom>
           <a:solidFill>
@@ -2865,13 +2854,13 @@
       </p:sp>
       <p:sp>
         <p:nvSpPr>
-          <p:cNvPr id="15" name="Text 13"/>
-          <p:cNvSpPr/>
-          <p:nvPr/>
-        </p:nvSpPr>
-        <p:spPr>
-          <a:xfrm>
-            <a:off x="6437376" y="2468880"/>
+          <p:cNvPr id="17" name="Text 15"/>
+          <p:cNvSpPr/>
+          <p:nvPr/>
+        </p:nvSpPr>
+        <p:spPr>
+          <a:xfrm>
+            <a:off x="6437376" y="2414016"/>
             <a:ext cx="2331720" cy="274320"/>
           </a:xfrm>
           <a:prstGeom prst="rect">
@@ -2904,14 +2893,14 @@
       </p:sp>
       <p:sp>
         <p:nvSpPr>
-          <p:cNvPr id="16" name="Text 14"/>
-          <p:cNvSpPr/>
-          <p:nvPr/>
-        </p:nvSpPr>
-        <p:spPr>
-          <a:xfrm>
-            <a:off x="6437376" y="2752344"/>
-            <a:ext cx="2331720" cy="411480"/>
+          <p:cNvPr id="18" name="Text 16"/>
+          <p:cNvSpPr/>
+          <p:nvPr/>
+        </p:nvSpPr>
+        <p:spPr>
+          <a:xfrm>
+            <a:off x="6437376" y="2688336"/>
+            <a:ext cx="2331720" cy="384048"/>
           </a:xfrm>
           <a:prstGeom prst="rect">
             <a:avLst/>
@@ -2927,7 +2916,7 @@
               <a:buNone/>
             </a:pPr>
             <a:r>
-              <a:rPr lang="en-US" sz="1900" b="1" dirty="0">
+              <a:rPr lang="en-US" sz="1800" b="1" dirty="0">
                 <a:solidFill>
                   <a:srgbClr val="0B5563"/>
                 </a:solidFill>
@@ -2937,20 +2926,59 @@
               </a:rPr>
               <a:t>$180.000</a:t>
             </a:r>
-            <a:endParaRPr lang="en-US" sz="1900" dirty="0"/>
-          </a:p>
-        </p:txBody>
-      </p:sp>
-      <p:sp>
-        <p:nvSpPr>
-          <p:cNvPr id="17" name="Text 15"/>
-          <p:cNvSpPr/>
-          <p:nvPr/>
-        </p:nvSpPr>
-        <p:spPr>
-          <a:xfrm>
-            <a:off x="6437376" y="3200400"/>
-            <a:ext cx="2331720" cy="731520"/>
+            <a:endParaRPr lang="en-US" sz="1800" dirty="0"/>
+          </a:p>
+        </p:txBody>
+      </p:sp>
+      <p:sp>
+        <p:nvSpPr>
+          <p:cNvPr id="19" name="Text 17"/>
+          <p:cNvSpPr/>
+          <p:nvPr/>
+        </p:nvSpPr>
+        <p:spPr>
+          <a:xfrm>
+            <a:off x="6437376" y="3090672"/>
+            <a:ext cx="2331720" cy="256032"/>
+          </a:xfrm>
+          <a:prstGeom prst="rect">
+            <a:avLst/>
+          </a:prstGeom>
+          <a:noFill/>
+          <a:ln/>
+        </p:spPr>
+        <p:txBody>
+          <a:bodyPr wrap="square" lIns="0" tIns="0" rIns="0" bIns="0" rtlCol="0" anchor="ctr"/>
+          <a:lstStyle/>
+          <a:p>
+            <a:pPr indent="0" marL="0">
+              <a:buNone/>
+            </a:pPr>
+            <a:r>
+              <a:rPr lang="en-US" sz="1100" b="1" dirty="0">
+                <a:solidFill>
+                  <a:srgbClr val="1E7A46"/>
+                </a:solidFill>
+                <a:latin typeface="Calibri" pitchFamily="34" charset="0"/>
+                <a:ea typeface="Calibri" pitchFamily="34" charset="-122"/>
+                <a:cs typeface="Calibri" pitchFamily="34" charset="-120"/>
+              </a:rPr>
+              <a:t>Técnico recibe: $133.859</a:t>
+            </a:r>
+            <a:endParaRPr lang="en-US" sz="1100" dirty="0"/>
+          </a:p>
+        </p:txBody>
+      </p:sp>
+      <p:sp>
+        <p:nvSpPr>
+          <p:cNvPr id="20" name="Text 18"/>
+          <p:cNvSpPr/>
+          <p:nvPr/>
+        </p:nvSpPr>
+        <p:spPr>
+          <a:xfrm>
+            <a:off x="6437376" y="3383280"/>
+            <a:ext cx="2331720" cy="621792"/>
           </a:xfrm>
           <a:prstGeom prst="rect">
             <a:avLst/>
@@ -2974,7 +3002,7 @@
                 <a:ea typeface="Calibri" pitchFamily="34" charset="-122"/>
                 <a:cs typeface="Calibri" pitchFamily="34" charset="-120"/>
               </a:rPr>
-              <a:t>Todo incluido: filtro + mano de obra + IVA. Neto técnico: $137.510 (de ahí sale el filtro).</a:t>
+              <a:t>Todo incluido: filtro + mano de obra + IVA. El filtro sale del neto del técnico.</a:t>
             </a:r>
             <a:endParaRPr lang="en-US" sz="950" dirty="0"/>
           </a:p>
@@ -2982,13 +3010,13 @@
       </p:sp>
       <p:sp>
         <p:nvSpPr>
-          <p:cNvPr id="18" name="Text 16"/>
-          <p:cNvSpPr/>
-          <p:nvPr/>
-        </p:nvSpPr>
-        <p:spPr>
-          <a:xfrm>
-            <a:off x="457200" y="4206240"/>
+          <p:cNvPr id="21" name="Text 19"/>
+          <p:cNvSpPr/>
+          <p:nvPr/>
+        </p:nvSpPr>
+        <p:spPr>
+          <a:xfrm>
+            <a:off x="457200" y="4251960"/>
             <a:ext cx="8229600" cy="594360"/>
           </a:xfrm>
           <a:prstGeom prst="rect">
@@ -3005,7 +3033,21 @@
               <a:buNone/>
             </a:pPr>
             <a:r>
-              <a:rPr lang="en-US" sz="1100" b="1" dirty="0">
+              <a:rPr lang="en-US" sz="1050" b="1" dirty="0">
+                <a:solidFill>
+                  <a:srgbClr val="1E7A46"/>
+                </a:solidFill>
+                <a:latin typeface="Calibri" pitchFamily="34" charset="0"/>
+                <a:ea typeface="Calibri" pitchFamily="34" charset="-122"/>
+                <a:cs typeface="Calibri" pitchFamily="34" charset="-120"/>
+              </a:rPr>
+              <a:t>En cotización libre el técnico recibe íntegro el costo que ingresó; en tarifa fija recibe catálogo ÷ 1.3447; la visita de diagnóstico paga $35.000 fijos. </a:t>
+            </a:r>
+            <a:pPr indent="0" marL="0">
+              <a:buNone/>
+            </a:pPr>
+            <a:r>
+              <a:rPr lang="en-US" sz="1050" dirty="0">
                 <a:solidFill>
                   <a:srgbClr val="1B2A32"/>
                 </a:solidFill>
@@ -3013,23 +3055,9 @@
                 <a:ea typeface="Calibri" pitchFamily="34" charset="-122"/>
                 <a:cs typeface="Calibri" pitchFamily="34" charset="-120"/>
               </a:rPr>
-              <a:t>El cliente solo ve “Total: $X (incluye IVA)” — sin desglose. </a:t>
-            </a:r>
-            <a:pPr indent="0" marL="0">
-              <a:buNone/>
-            </a:pPr>
-            <a:r>
-              <a:rPr lang="en-US" sz="1100" dirty="0">
-                <a:solidFill>
-                  <a:srgbClr val="1B2A32"/>
-                </a:solidFill>
-                <a:latin typeface="Calibri" pitchFamily="34" charset="0"/>
-                <a:ea typeface="Calibri" pitchFamily="34" charset="-122"/>
-                <a:cs typeface="Calibri" pitchFamily="34" charset="-120"/>
-              </a:rPr>
-              <a:t>Internamente se separa base + IVA + margen para la factura electrónica DIAN. En tarifa fija, el neto del técnico = catálogo ÷ 1.309.</a:t>
-            </a:r>
-            <a:endParaRPr lang="en-US" sz="1100" dirty="0"/>
+              <a:t>El cliente solo ve “Total: $X (incluye IVA)” — sin desglose. Internamente se separa base + IVA + margen para la factura electrónica DIAN.</a:t>
+            </a:r>
+            <a:endParaRPr lang="en-US" sz="1050" dirty="0"/>
           </a:p>
         </p:txBody>
       </p:sp>
@@ -4930,7 +4958,7 @@
                 <a:ea typeface="Calibri" pitchFamily="34" charset="-122"/>
                 <a:cs typeface="Calibri" pitchFamily="34" charset="-120"/>
               </a:rPr>
-              <a:t>El técnico ingresa su costo total; el sistema calcula × 1.309 y envía la cotización al cliente automáticamente.</a:t>
+              <a:t>El técnico ingresa su costo total; el sistema calcula × 1.3447 y envía la cotización al cliente automáticamente.</a:t>
             </a:r>
             <a:endParaRPr lang="en-US" sz="950" dirty="0"/>
           </a:p>
@@ -5478,7 +5506,7 @@
                 <a:ea typeface="Calibri" pitchFamily="34" charset="-122"/>
                 <a:cs typeface="Calibri" pitchFamily="34" charset="-120"/>
               </a:rPr>
-              <a:t>Cliente pagó a Baird el total con IVA. Técnico recibe su costo neto íntegro; Baird retiene IVA + margen 10%.</a:t>
+              <a:t>Cliente pagó a Baird el total con IVA. Técnico recibe su costo neto íntegro; Baird retiene IVA + utilidad 13%.</a:t>
             </a:r>
             <a:endParaRPr lang="en-US" sz="950" dirty="0"/>
           </a:p>
@@ -6127,296 +6155,7 @@
         <p:spPr>
           <a:xfrm>
             <a:off x="4846320" y="3127248"/>
-            <a:ext cx="3611880" cy="1600200"/>
-          </a:xfrm>
-          <a:prstGeom prst="rect">
-            <a:avLst/>
-          </a:prstGeom>
-          <a:noFill/>
-          <a:ln/>
-        </p:spPr>
-        <p:txBody>
-          <a:bodyPr wrap="square" lIns="0" tIns="0" rIns="0" bIns="0" rtlCol="0" anchor="t"/>
-          <a:lstStyle/>
-          <a:p>
-            <a:pPr marL="342900" indent="-342900">
-              <a:spcAft>
-                <a:spcPts val="400"/>
-              </a:spcAft>
-              <a:buSzPct val="100000"/>
-              <a:buChar char="•"/>
-            </a:pPr>
-            <a:r>
-              <a:rPr lang="en-US" sz="1000" dirty="0">
-                <a:solidFill>
-                  <a:srgbClr val="1B2A32"/>
-                </a:solidFill>
-                <a:latin typeface="Calibri" pitchFamily="34" charset="0"/>
-                <a:ea typeface="Calibri" pitchFamily="34" charset="-122"/>
-                <a:cs typeface="Calibri" pitchFamily="34" charset="-120"/>
-              </a:rPr>
-              <a:t>Agregar robots.ts y sitemap.ts (nativos de Next 16) — indexar solo páginas públicas</a:t>
-            </a:r>
-            <a:endParaRPr lang="en-US" sz="1000" dirty="0"/>
-          </a:p>
-          <a:p>
-            <a:pPr marL="342900" indent="-342900">
-              <a:spcAft>
-                <a:spcPts val="400"/>
-              </a:spcAft>
-              <a:buSzPct val="100000"/>
-              <a:buChar char="•"/>
-            </a:pPr>
-            <a:r>
-              <a:rPr lang="en-US" sz="1000" dirty="0">
-                <a:solidFill>
-                  <a:srgbClr val="1B2A32"/>
-                </a:solidFill>
-                <a:latin typeface="Calibri" pitchFamily="34" charset="0"/>
-                <a:ea typeface="Calibri" pitchFamily="34" charset="-122"/>
-                <a:cs typeface="Calibri" pitchFamily="34" charset="-120"/>
-              </a:rPr>
-              <a:t>Marcar noindex las rutas tokenizadas (privacidad del cliente)</a:t>
-            </a:r>
-            <a:endParaRPr lang="en-US" sz="1000" dirty="0"/>
-          </a:p>
-          <a:p>
-            <a:pPr marL="342900" indent="-342900">
-              <a:spcAft>
-                <a:spcPts val="400"/>
-              </a:spcAft>
-              <a:buSzPct val="100000"/>
-              <a:buChar char="•"/>
-            </a:pPr>
-            <a:r>
-              <a:rPr lang="en-US" sz="1000" dirty="0">
-                <a:solidFill>
-                  <a:srgbClr val="1B2A32"/>
-                </a:solidFill>
-                <a:latin typeface="Calibri" pitchFamily="34" charset="0"/>
-                <a:ea typeface="Calibri" pitchFamily="34" charset="-122"/>
-                <a:cs typeface="Calibri" pitchFamily="34" charset="-120"/>
-              </a:rPr>
-              <a:t>Registrar el subdominio en Search Console y enviar el sitemap</a:t>
-            </a:r>
-            <a:endParaRPr lang="en-US" sz="1000" dirty="0"/>
-          </a:p>
-          <a:p>
-            <a:pPr marL="342900" indent="-342900">
-              <a:spcAft>
-                <a:spcPts val="400"/>
-              </a:spcAft>
-              <a:buSzPct val="100000"/>
-              <a:buChar char="•"/>
-            </a:pPr>
-            <a:r>
-              <a:rPr lang="en-US" sz="1000" dirty="0">
-                <a:solidFill>
-                  <a:srgbClr val="1B2A32"/>
-                </a:solidFill>
-                <a:latin typeface="Calibri" pitchFamily="34" charset="0"/>
-                <a:ea typeface="Calibri" pitchFamily="34" charset="-122"/>
-                <a:cs typeface="Calibri" pitchFamily="34" charset="-120"/>
-              </a:rPr>
-              <a:t>Canonical: el alias baird-app.vercel.app sigue vivo — riesgo de contenido duplicado</a:t>
-            </a:r>
-            <a:endParaRPr lang="en-US" sz="1000" dirty="0"/>
-          </a:p>
-        </p:txBody>
-      </p:sp>
-    </p:spTree>
-  </p:cSld>
-  <p:clrMapOvr>
-    <a:masterClrMapping/>
-  </p:clrMapOvr>
-</p:sld>
-</file>
-
-<file path=ppt/slides/slide14.xml><?xml version="1.0" encoding="utf-8"?>
-<p:sld xmlns:a="http://schemas.openxmlformats.org/drawingml/2006/main" xmlns:r="http://schemas.openxmlformats.org/officeDocument/2006/relationships" xmlns:p="http://schemas.openxmlformats.org/presentationml/2006/main">
-  <p:cSld name="Slide 14">
-    <p:bg>
-      <p:bgPr>
-        <a:solidFill>
-          <a:srgbClr val="0E3540"/>
-        </a:solidFill>
-      </p:bgPr>
-    </p:bg>
-    <p:spTree>
-      <p:nvGrpSpPr>
-        <p:cNvPr id="1" name=""/>
-        <p:cNvGrpSpPr/>
-        <p:nvPr/>
-      </p:nvGrpSpPr>
-      <p:grpSpPr>
-        <a:xfrm>
-          <a:off x="0" y="0"/>
-          <a:ext cx="0" cy="0"/>
-          <a:chOff x="0" y="0"/>
-          <a:chExt cx="0" cy="0"/>
-        </a:xfrm>
-      </p:grpSpPr>
-      <p:sp>
-        <p:nvSpPr>
-          <p:cNvPr id="2" name="Text 0"/>
-          <p:cNvSpPr/>
-          <p:nvPr/>
-        </p:nvSpPr>
-        <p:spPr>
-          <a:xfrm>
-            <a:off x="457200" y="320040"/>
-            <a:ext cx="8229600" cy="502920"/>
-          </a:xfrm>
-          <a:prstGeom prst="rect">
-            <a:avLst/>
-          </a:prstGeom>
-          <a:noFill/>
-          <a:ln/>
-        </p:spPr>
-        <p:txBody>
-          <a:bodyPr wrap="square" lIns="0" tIns="0" rIns="0" bIns="0" rtlCol="0" anchor="ctr"/>
-          <a:lstStyle/>
-          <a:p>
-            <a:pPr indent="0" marL="0">
-              <a:buNone/>
-            </a:pPr>
-            <a:r>
-              <a:rPr lang="en-US" sz="2800" b="1" dirty="0">
-                <a:solidFill>
-                  <a:srgbClr val="FFFFFF"/>
-                </a:solidFill>
-                <a:latin typeface="Cambria" pitchFamily="34" charset="0"/>
-                <a:ea typeface="Cambria" pitchFamily="34" charset="-122"/>
-                <a:cs typeface="Cambria" pitchFamily="34" charset="-120"/>
-              </a:rPr>
-              <a:t>Diagnóstico y próximos pasos</a:t>
-            </a:r>
-            <a:endParaRPr lang="en-US" sz="2800" dirty="0"/>
-          </a:p>
-        </p:txBody>
-      </p:sp>
-      <p:sp>
-        <p:nvSpPr>
-          <p:cNvPr id="3" name="Text 1"/>
-          <p:cNvSpPr/>
-          <p:nvPr/>
-        </p:nvSpPr>
-        <p:spPr>
-          <a:xfrm>
-            <a:off x="457200" y="822960"/>
-            <a:ext cx="8229600" cy="274320"/>
-          </a:xfrm>
-          <a:prstGeom prst="rect">
-            <a:avLst/>
-          </a:prstGeom>
-          <a:noFill/>
-          <a:ln/>
-        </p:spPr>
-        <p:txBody>
-          <a:bodyPr wrap="square" lIns="0" tIns="0" rIns="0" bIns="0" rtlCol="0" anchor="ctr"/>
-          <a:lstStyle/>
-          <a:p>
-            <a:pPr indent="0" marL="0">
-              <a:buNone/>
-            </a:pPr>
-            <a:r>
-              <a:rPr lang="en-US" sz="1250" dirty="0">
-                <a:solidFill>
-                  <a:srgbClr val="8FB3B9"/>
-                </a:solidFill>
-                <a:latin typeface="Calibri" pitchFamily="34" charset="0"/>
-                <a:ea typeface="Calibri" pitchFamily="34" charset="-122"/>
-                <a:cs typeface="Calibri" pitchFamily="34" charset="-120"/>
-              </a:rPr>
-              <a:t>Estado a julio 2026</a:t>
-            </a:r>
-            <a:endParaRPr lang="en-US" sz="1250" dirty="0"/>
-          </a:p>
-        </p:txBody>
-      </p:sp>
-      <p:sp>
-        <p:nvSpPr>
-          <p:cNvPr id="4" name="Shape 2"/>
-          <p:cNvSpPr/>
-          <p:nvPr/>
-        </p:nvSpPr>
-        <p:spPr>
-          <a:xfrm>
-            <a:off x="457200" y="1234440"/>
-            <a:ext cx="3977640" cy="3429000"/>
-          </a:xfrm>
-          <a:prstGeom prst="roundRect">
-            <a:avLst>
-              <a:gd name="adj" fmla="val 1867"/>
-            </a:avLst>
-          </a:prstGeom>
-          <a:solidFill>
-            <a:srgbClr val="12424F"/>
-          </a:solidFill>
-          <a:ln w="9525">
-            <a:solidFill>
-              <a:srgbClr val="DDE7E9"/>
-            </a:solidFill>
-            <a:prstDash val="solid"/>
-          </a:ln>
-          <a:effectLst>
-            <a:outerShdw sx="100000" sy="100000" kx="0" ky="0" algn="bl" rotWithShape="0" blurRad="76200" dist="25400" dir="2700000">
-              <a:srgbClr val="000000">
-                <a:alpha val="14000"/>
-              </a:srgbClr>
-            </a:outerShdw>
-          </a:effectLst>
-        </p:spPr>
-      </p:sp>
-      <p:sp>
-        <p:nvSpPr>
-          <p:cNvPr id="5" name="Text 3"/>
-          <p:cNvSpPr/>
-          <p:nvPr/>
-        </p:nvSpPr>
-        <p:spPr>
-          <a:xfrm>
-            <a:off x="685800" y="1371600"/>
-            <a:ext cx="3474720" cy="320040"/>
-          </a:xfrm>
-          <a:prstGeom prst="rect">
-            <a:avLst/>
-          </a:prstGeom>
-          <a:noFill/>
-          <a:ln/>
-        </p:spPr>
-        <p:txBody>
-          <a:bodyPr wrap="square" lIns="0" tIns="0" rIns="0" bIns="0" rtlCol="0" anchor="ctr"/>
-          <a:lstStyle/>
-          <a:p>
-            <a:pPr indent="0" marL="0">
-              <a:buNone/>
-            </a:pPr>
-            <a:r>
-              <a:rPr lang="en-US" sz="1400" b="1" dirty="0">
-                <a:solidFill>
-                  <a:srgbClr val="7FD4C1"/>
-                </a:solidFill>
-                <a:latin typeface="Calibri" pitchFamily="34" charset="0"/>
-                <a:ea typeface="Calibri" pitchFamily="34" charset="-122"/>
-                <a:cs typeface="Calibri" pitchFamily="34" charset="-120"/>
-              </a:rPr>
-              <a:t>Sólido hoy</a:t>
-            </a:r>
-            <a:endParaRPr lang="en-US" sz="1400" dirty="0"/>
-          </a:p>
-        </p:txBody>
-      </p:sp>
-      <p:sp>
-        <p:nvSpPr>
-          <p:cNvPr id="6" name="Text 4"/>
-          <p:cNvSpPr/>
-          <p:nvPr/>
-        </p:nvSpPr>
-        <p:spPr>
-          <a:xfrm>
-            <a:off x="685800" y="1737360"/>
-            <a:ext cx="3520440" cy="2788920"/>
+            <a:ext cx="3611880" cy="2788920"/>
           </a:xfrm>
           <a:prstGeom prst="rect">
             <a:avLst/>
@@ -6438,13 +6177,13 @@
             <a:r>
               <a:rPr lang="en-US" sz="1050" dirty="0">
                 <a:solidFill>
-                  <a:srgbClr val="DCE9EA"/>
-                </a:solidFill>
-                <a:latin typeface="Calibri" pitchFamily="34" charset="0"/>
-                <a:ea typeface="Calibri" pitchFamily="34" charset="-122"/>
-                <a:cs typeface="Calibri" pitchFamily="34" charset="-120"/>
-              </a:rPr>
-              <a:t>Ambos flujos operativos end-to-end en producción</a:t>
+                  <a:srgbClr val="F2E5C9"/>
+                </a:solidFill>
+                <a:latin typeface="Calibri" pitchFamily="34" charset="0"/>
+                <a:ea typeface="Calibri" pitchFamily="34" charset="-122"/>
+                <a:cs typeface="Calibri" pitchFamily="34" charset="-120"/>
+              </a:rPr>
+              <a:t>Agregar robots.ts y sitemap.ts (nativos de Next 16) — indexar solo páginas públicas</a:t>
             </a:r>
             <a:endParaRPr lang="en-US" sz="1050" dirty="0"/>
           </a:p>
@@ -6459,13 +6198,13 @@
             <a:r>
               <a:rPr lang="en-US" sz="1050" dirty="0">
                 <a:solidFill>
-                  <a:srgbClr val="DCE9EA"/>
-                </a:solidFill>
-                <a:latin typeface="Calibri" pitchFamily="34" charset="0"/>
-                <a:ea typeface="Calibri" pitchFamily="34" charset="-122"/>
-                <a:cs typeface="Calibri" pitchFamily="34" charset="-120"/>
-              </a:rPr>
-              <a:t>WhatsApp con token permanente y número propio; 22 plantillas aprobadas</a:t>
+                  <a:srgbClr val="F2E5C9"/>
+                </a:solidFill>
+                <a:latin typeface="Calibri" pitchFamily="34" charset="0"/>
+                <a:ea typeface="Calibri" pitchFamily="34" charset="-122"/>
+                <a:cs typeface="Calibri" pitchFamily="34" charset="-120"/>
+              </a:rPr>
+              <a:t>Marcar noindex las rutas tokenizadas (privacidad del cliente)</a:t>
             </a:r>
             <a:endParaRPr lang="en-US" sz="1050" dirty="0"/>
           </a:p>
@@ -6480,13 +6219,13 @@
             <a:r>
               <a:rPr lang="en-US" sz="1050" dirty="0">
                 <a:solidFill>
-                  <a:srgbClr val="DCE9EA"/>
-                </a:solidFill>
-                <a:latin typeface="Calibri" pitchFamily="34" charset="0"/>
-                <a:ea typeface="Calibri" pitchFamily="34" charset="-122"/>
-                <a:cs typeface="Calibri" pitchFamily="34" charset="-120"/>
-              </a:rPr>
-              <a:t>Evidencia robusta: GPS por fases, fotos, firmas, juramento, audit log append-only</a:t>
+                  <a:srgbClr val="F2E5C9"/>
+                </a:solidFill>
+                <a:latin typeface="Calibri" pitchFamily="34" charset="0"/>
+                <a:ea typeface="Calibri" pitchFamily="34" charset="-122"/>
+                <a:cs typeface="Calibri" pitchFamily="34" charset="-120"/>
+              </a:rPr>
+              <a:t>Registrar el subdominio en Search Console y enviar el sitemap</a:t>
             </a:r>
             <a:endParaRPr lang="en-US" sz="1050" dirty="0"/>
           </a:p>
@@ -6501,242 +6240,21 @@
             <a:r>
               <a:rPr lang="en-US" sz="1050" dirty="0">
                 <a:solidFill>
-                  <a:srgbClr val="DCE9EA"/>
-                </a:solidFill>
-                <a:latin typeface="Calibri" pitchFamily="34" charset="0"/>
-                <a:ea typeface="Calibri" pitchFamily="34" charset="-122"/>
-                <a:cs typeface="Calibri" pitchFamily="34" charset="-120"/>
-              </a:rPr>
-              <a:t>Tarifarios parametrizados en código con doc canónico (docs/TARIFAS.md)</a:t>
+                  <a:srgbClr val="F2E5C9"/>
+                </a:solidFill>
+                <a:latin typeface="Calibri" pitchFamily="34" charset="0"/>
+                <a:ea typeface="Calibri" pitchFamily="34" charset="-122"/>
+                <a:cs typeface="Calibri" pitchFamily="34" charset="-120"/>
+              </a:rPr>
+              <a:t>Canonical: el alias baird-app.vercel.app sigue vivo — riesgo de contenido duplicado</a:t>
             </a:r>
             <a:endParaRPr lang="en-US" sz="1050" dirty="0"/>
           </a:p>
-          <a:p>
-            <a:pPr marL="342900" indent="-342900">
-              <a:spcAft>
-                <a:spcPts val="600"/>
-              </a:spcAft>
-              <a:buSzPct val="100000"/>
-              <a:buChar char="•"/>
-            </a:pPr>
-            <a:r>
-              <a:rPr lang="en-US" sz="1050" dirty="0">
-                <a:solidFill>
-                  <a:srgbClr val="DCE9EA"/>
-                </a:solidFill>
-                <a:latin typeface="Calibri" pitchFamily="34" charset="0"/>
-                <a:ea typeface="Calibri" pitchFamily="34" charset="-122"/>
-                <a:cs typeface="Calibri" pitchFamily="34" charset="-120"/>
-              </a:rPr>
-              <a:t>Marco legal alineado a ley colombiana (Ley 1581, Estatuto del Consumidor)</a:t>
-            </a:r>
-            <a:endParaRPr lang="en-US" sz="1050" dirty="0"/>
-          </a:p>
-        </p:txBody>
-      </p:sp>
-      <p:sp>
-        <p:nvSpPr>
-          <p:cNvPr id="7" name="Shape 5"/>
-          <p:cNvSpPr/>
-          <p:nvPr/>
-        </p:nvSpPr>
-        <p:spPr>
-          <a:xfrm>
-            <a:off x="4617720" y="1234440"/>
-            <a:ext cx="4069080" cy="3429000"/>
-          </a:xfrm>
-          <a:prstGeom prst="roundRect">
-            <a:avLst>
-              <a:gd name="adj" fmla="val 1867"/>
-            </a:avLst>
-          </a:prstGeom>
-          <a:solidFill>
-            <a:srgbClr val="3A2E14"/>
-          </a:solidFill>
-          <a:ln w="9525">
-            <a:solidFill>
-              <a:srgbClr val="DDE7E9"/>
-            </a:solidFill>
-            <a:prstDash val="solid"/>
-          </a:ln>
-          <a:effectLst>
-            <a:outerShdw sx="100000" sy="100000" kx="0" ky="0" algn="bl" rotWithShape="0" blurRad="76200" dist="25400" dir="2700000">
-              <a:srgbClr val="000000">
-                <a:alpha val="14000"/>
-              </a:srgbClr>
-            </a:outerShdw>
-          </a:effectLst>
-        </p:spPr>
-      </p:sp>
-      <p:sp>
-        <p:nvSpPr>
-          <p:cNvPr id="8" name="Text 6"/>
-          <p:cNvSpPr/>
-          <p:nvPr/>
-        </p:nvSpPr>
-        <p:spPr>
-          <a:xfrm>
-            <a:off x="4846320" y="1371600"/>
-            <a:ext cx="3657600" cy="320040"/>
-          </a:xfrm>
-          <a:prstGeom prst="rect">
-            <a:avLst/>
-          </a:prstGeom>
-          <a:noFill/>
-          <a:ln/>
-        </p:spPr>
-        <p:txBody>
-          <a:bodyPr wrap="square" lIns="0" tIns="0" rIns="0" bIns="0" rtlCol="0" anchor="ctr"/>
-          <a:lstStyle/>
-          <a:p>
-            <a:pPr indent="0" marL="0">
-              <a:buNone/>
-            </a:pPr>
-            <a:r>
-              <a:rPr lang="en-US" sz="1400" b="1" dirty="0">
-                <a:solidFill>
-                  <a:srgbClr val="F59E0B"/>
-                </a:solidFill>
-                <a:latin typeface="Calibri" pitchFamily="34" charset="0"/>
-                <a:ea typeface="Calibri" pitchFamily="34" charset="-122"/>
-                <a:cs typeface="Calibri" pitchFamily="34" charset="-120"/>
-              </a:rPr>
-              <a:t>Pendientes clave</a:t>
-            </a:r>
-            <a:endParaRPr lang="en-US" sz="1400" dirty="0"/>
-          </a:p>
-        </p:txBody>
-      </p:sp>
-      <p:sp>
-        <p:nvSpPr>
-          <p:cNvPr id="9" name="Text 7"/>
-          <p:cNvSpPr/>
-          <p:nvPr/>
-        </p:nvSpPr>
-        <p:spPr>
-          <a:xfrm>
-            <a:off x="4846320" y="1737360"/>
-            <a:ext cx="3611880" cy="2788920"/>
-          </a:xfrm>
-          <a:prstGeom prst="rect">
-            <a:avLst/>
-          </a:prstGeom>
-          <a:noFill/>
-          <a:ln/>
-        </p:spPr>
-        <p:txBody>
-          <a:bodyPr wrap="square" lIns="0" tIns="0" rIns="0" bIns="0" rtlCol="0" anchor="t"/>
-          <a:lstStyle/>
-          <a:p>
-            <a:pPr marL="342900" indent="-342900">
-              <a:spcAft>
-                <a:spcPts val="600"/>
-              </a:spcAft>
-              <a:buSzPct val="100000"/>
-              <a:buChar char="•"/>
-            </a:pPr>
-            <a:r>
-              <a:rPr lang="en-US" sz="1050" dirty="0">
-                <a:solidFill>
-                  <a:srgbClr val="F2E5C9"/>
-                </a:solidFill>
-                <a:latin typeface="Calibri" pitchFamily="34" charset="0"/>
-                <a:ea typeface="Calibri" pitchFamily="34" charset="-122"/>
-                <a:cs typeface="Calibri" pitchFamily="34" charset="-120"/>
-              </a:rPr>
-              <a:t>Seguridad: RLS apagado en solicitudes_servicio (tabla principal) y policies de escritura abiertas</a:t>
-            </a:r>
-            <a:endParaRPr lang="en-US" sz="1050" dirty="0"/>
-          </a:p>
-          <a:p>
-            <a:pPr marL="342900" indent="-342900">
-              <a:spcAft>
-                <a:spcPts val="600"/>
-              </a:spcAft>
-              <a:buSzPct val="100000"/>
-              <a:buChar char="•"/>
-            </a:pPr>
-            <a:r>
-              <a:rPr lang="en-US" sz="1050" dirty="0">
-                <a:solidFill>
-                  <a:srgbClr val="F2E5C9"/>
-                </a:solidFill>
-                <a:latin typeface="Calibri" pitchFamily="34" charset="0"/>
-                <a:ea typeface="Calibri" pitchFamily="34" charset="-122"/>
-                <a:cs typeface="Calibri" pitchFamily="34" charset="-120"/>
-              </a:rPr>
-              <a:t>3 plantillas WhatsApp que el código invoca no están subidas a Meta</a:t>
-            </a:r>
-            <a:endParaRPr lang="en-US" sz="1050" dirty="0"/>
-          </a:p>
-          <a:p>
-            <a:pPr marL="342900" indent="-342900">
-              <a:spcAft>
-                <a:spcPts val="600"/>
-              </a:spcAft>
-              <a:buSzPct val="100000"/>
-              <a:buChar char="•"/>
-            </a:pPr>
-            <a:r>
-              <a:rPr lang="en-US" sz="1050" dirty="0">
-                <a:solidFill>
-                  <a:srgbClr val="F2E5C9"/>
-                </a:solidFill>
-                <a:latin typeface="Calibri" pitchFamily="34" charset="0"/>
-                <a:ea typeface="Calibri" pitchFamily="34" charset="-122"/>
-                <a:cs typeface="Calibri" pitchFamily="34" charset="-120"/>
-              </a:rPr>
-              <a:t>Pagos: sin pasarela split-payment ni factura electrónica DIAN automática; retenciones manuales</a:t>
-            </a:r>
-            <a:endParaRPr lang="en-US" sz="1050" dirty="0"/>
-          </a:p>
-          <a:p>
-            <a:pPr marL="342900" indent="-342900">
-              <a:spcAft>
-                <a:spcPts val="600"/>
-              </a:spcAft>
-              <a:buSzPct val="100000"/>
-              <a:buChar char="•"/>
-            </a:pPr>
-            <a:r>
-              <a:rPr lang="en-US" sz="1050" dirty="0">
-                <a:solidFill>
-                  <a:srgbClr val="F2E5C9"/>
-                </a:solidFill>
-                <a:latin typeface="Calibri" pitchFamily="34" charset="0"/>
-                <a:ea typeface="Calibri" pitchFamily="34" charset="-122"/>
-                <a:cs typeface="Calibri" pitchFamily="34" charset="-120"/>
-              </a:rPr>
-              <a:t>0 tests automatizados (Vitest configurado, sin tests)</a:t>
-            </a:r>
-            <a:endParaRPr lang="en-US" sz="1050" dirty="0"/>
-          </a:p>
-          <a:p>
-            <a:pPr marL="342900" indent="-342900">
-              <a:spcAft>
-                <a:spcPts val="600"/>
-              </a:spcAft>
-              <a:buSzPct val="100000"/>
-              <a:buChar char="•"/>
-            </a:pPr>
-            <a:r>
-              <a:rPr lang="en-US" sz="1050" dirty="0">
-                <a:solidFill>
-                  <a:srgbClr val="F2E5C9"/>
-                </a:solidFill>
-                <a:latin typeface="Calibri" pitchFamily="34" charset="0"/>
-                <a:ea typeface="Calibri" pitchFamily="34" charset="-122"/>
-                <a:cs typeface="Calibri" pitchFamily="34" charset="-120"/>
-              </a:rPr>
-              <a:t>SEO / indexación: robots, sitemap, Search Console, canonical</a:t>
-            </a:r>
-            <a:endParaRPr lang="en-US" sz="1050" dirty="0"/>
-          </a:p>
-        </p:txBody>
-      </p:sp>
-      <p:sp>
-        <p:nvSpPr>
-          <p:cNvPr id="10" name="Text 8"/>
+        </p:txBody>
+      </p:sp>
+      <p:sp>
+        <p:nvSpPr>
+          <p:cNvPr id="17" name="Text 13"/>
           <p:cNvSpPr/>
           <p:nvPr/>
         </p:nvSpPr>
@@ -12558,10 +12076,11 @@
             <a:tbl>
               <a:tblPr/>
               <a:tblGrid>
-                <a:gridCol w="1188720"/>
-                <a:gridCol w="1097280"/>
-                <a:gridCol w="1005840"/>
-                <a:gridCol w="1005840"/>
+                <a:gridCol w="914400"/>
+                <a:gridCol w="841248"/>
+                <a:gridCol w="932688"/>
+                <a:gridCol w="804672"/>
+                <a:gridCol w="804672"/>
               </a:tblGrid>
               <a:tr h="347472">
                 <a:tc>
@@ -12573,7 +12092,7 @@
                         <a:buNone/>
                       </a:pPr>
                       <a:r>
-                        <a:rPr lang="en-US" sz="1150" b="1" dirty="0">
+                        <a:rPr lang="en-US" sz="1000" b="1" dirty="0">
                           <a:solidFill>
                             <a:srgbClr val="FFFFFF"/>
                           </a:solidFill>
@@ -12583,7 +12102,7 @@
                         </a:rPr>
                         <a:t>Complejidad</a:t>
                       </a:r>
-                      <a:endParaRPr lang="en-US" sz="1150" dirty="0">
+                      <a:endParaRPr lang="en-US" sz="1000" dirty="0">
                         <a:latin typeface="Calibri" charset="0"/>
                         <a:ea typeface="Calibri" charset="0"/>
                         <a:cs typeface="Calibri" charset="0"/>
@@ -12641,7 +12160,7 @@
                         <a:buNone/>
                       </a:pPr>
                       <a:r>
-                        <a:rPr lang="en-US" sz="1150" b="1" dirty="0">
+                        <a:rPr lang="en-US" sz="1000" b="1" dirty="0">
                           <a:solidFill>
                             <a:srgbClr val="FFFFFF"/>
                           </a:solidFill>
@@ -12651,7 +12170,7 @@
                         </a:rPr>
                         <a:t>Base MABE</a:t>
                       </a:r>
-                      <a:endParaRPr lang="en-US" sz="1150" dirty="0">
+                      <a:endParaRPr lang="en-US" sz="1000" dirty="0">
                         <a:latin typeface="Calibri" charset="0"/>
                         <a:ea typeface="Calibri" charset="0"/>
                         <a:cs typeface="Calibri" charset="0"/>
@@ -12709,7 +12228,7 @@
                         <a:buNone/>
                       </a:pPr>
                       <a:r>
-                        <a:rPr lang="en-US" sz="1150" b="1" dirty="0">
+                        <a:rPr lang="en-US" sz="1000" b="1" dirty="0">
                           <a:solidFill>
                             <a:srgbClr val="FFFFFF"/>
                           </a:solidFill>
@@ -12717,9 +12236,9 @@
                           <a:ea typeface="Calibri" pitchFamily="34" charset="-122"/>
                           <a:cs typeface="Calibri" pitchFamily="34" charset="-120"/>
                         </a:rPr>
-                        <a:t>Bono máx.*</a:t>
+                        <a:t>Técnico (78%)</a:t>
                       </a:r>
-                      <a:endParaRPr lang="en-US" sz="1150" dirty="0">
+                      <a:endParaRPr lang="en-US" sz="1000" dirty="0">
                         <a:latin typeface="Calibri" charset="0"/>
                         <a:ea typeface="Calibri" charset="0"/>
                         <a:cs typeface="Calibri" charset="0"/>
@@ -12777,7 +12296,75 @@
                         <a:buNone/>
                       </a:pPr>
                       <a:r>
-                        <a:rPr lang="en-US" sz="1150" b="1" dirty="0">
+                        <a:rPr lang="en-US" sz="1000" b="1" dirty="0">
+                          <a:solidFill>
+                            <a:srgbClr val="FFFFFF"/>
+                          </a:solidFill>
+                          <a:latin typeface="Calibri" pitchFamily="34" charset="0"/>
+                          <a:ea typeface="Calibri" pitchFamily="34" charset="-122"/>
+                          <a:cs typeface="Calibri" pitchFamily="34" charset="-120"/>
+                        </a:rPr>
+                        <a:t>Bono máx.*</a:t>
+                      </a:r>
+                      <a:endParaRPr lang="en-US" sz="1000" dirty="0">
+                        <a:latin typeface="Calibri" charset="0"/>
+                        <a:ea typeface="Calibri" charset="0"/>
+                        <a:cs typeface="Calibri" charset="0"/>
+                      </a:endParaRPr>
+                    </a:p>
+                  </a:txBody>
+                  <a:tcPr marL="91440" marR="91440" marT="45720" marB="45720" anchor="ctr">
+                    <a:lnL w="9525" cap="flat" cmpd="sng" algn="ctr">
+                      <a:solidFill>
+                        <a:srgbClr val="D5E2E5"/>
+                      </a:solidFill>
+                      <a:prstDash val="solid"/>
+                      <a:round/>
+                      <a:headEnd type="none" w="med" len="med"/>
+                      <a:tailEnd type="none" w="med" len="med"/>
+                    </a:lnL>
+                    <a:lnR w="9525" cap="flat" cmpd="sng" algn="ctr">
+                      <a:solidFill>
+                        <a:srgbClr val="D5E2E5"/>
+                      </a:solidFill>
+                      <a:prstDash val="solid"/>
+                      <a:round/>
+                      <a:headEnd type="none" w="med" len="med"/>
+                      <a:tailEnd type="none" w="med" len="med"/>
+                    </a:lnR>
+                    <a:lnT w="9525" cap="flat" cmpd="sng" algn="ctr">
+                      <a:solidFill>
+                        <a:srgbClr val="D5E2E5"/>
+                      </a:solidFill>
+                      <a:prstDash val="solid"/>
+                      <a:round/>
+                      <a:headEnd type="none" w="med" len="med"/>
+                      <a:tailEnd type="none" w="med" len="med"/>
+                    </a:lnT>
+                    <a:lnB w="9525" cap="flat" cmpd="sng" algn="ctr">
+                      <a:solidFill>
+                        <a:srgbClr val="D5E2E5"/>
+                      </a:solidFill>
+                      <a:prstDash val="solid"/>
+                      <a:round/>
+                      <a:headEnd type="none" w="med" len="med"/>
+                      <a:tailEnd type="none" w="med" len="med"/>
+                    </a:lnB>
+                    <a:solidFill>
+                      <a:srgbClr val="0B5563"/>
+                    </a:solidFill>
+                  </a:tcPr>
+                </a:tc>
+                <a:tc>
+                  <a:txBody>
+                    <a:bodyPr/>
+                    <a:lstStyle/>
+                    <a:p>
+                      <a:pPr algn="ctr" indent="0" marL="0">
+                        <a:buNone/>
+                      </a:pPr>
+                      <a:r>
+                        <a:rPr lang="en-US" sz="1000" b="1" dirty="0">
                           <a:solidFill>
                             <a:srgbClr val="FFFFFF"/>
                           </a:solidFill>
@@ -12787,7 +12374,7 @@
                         </a:rPr>
                         <a:t>Recargo finde</a:t>
                       </a:r>
-                      <a:endParaRPr lang="en-US" sz="1150" dirty="0">
+                      <a:endParaRPr lang="en-US" sz="1000" dirty="0">
                         <a:latin typeface="Calibri" charset="0"/>
                         <a:ea typeface="Calibri" charset="0"/>
                         <a:cs typeface="Calibri" charset="0"/>
@@ -12847,7 +12434,7 @@
                         <a:buNone/>
                       </a:pPr>
                       <a:r>
-                        <a:rPr lang="en-US" sz="1150" dirty="0">
+                        <a:rPr lang="en-US" sz="1000" dirty="0">
                           <a:solidFill>
                             <a:srgbClr val="1B2A32"/>
                           </a:solidFill>
@@ -12857,7 +12444,7 @@
                         </a:rPr>
                         <a:t>Baja</a:t>
                       </a:r>
-                      <a:endParaRPr lang="en-US" sz="1150" dirty="0">
+                      <a:endParaRPr lang="en-US" sz="1000" dirty="0">
                         <a:latin typeface="Calibri" charset="0"/>
                         <a:ea typeface="Calibri" charset="0"/>
                         <a:cs typeface="Calibri" charset="0"/>
@@ -12912,7 +12499,7 @@
                         <a:buNone/>
                       </a:pPr>
                       <a:r>
-                        <a:rPr lang="en-US" sz="1150" dirty="0">
+                        <a:rPr lang="en-US" sz="1000" dirty="0">
                           <a:solidFill>
                             <a:srgbClr val="1B2A32"/>
                           </a:solidFill>
@@ -12922,7 +12509,7 @@
                         </a:rPr>
                         <a:t>$42.000</a:t>
                       </a:r>
-                      <a:endParaRPr lang="en-US" sz="1150" dirty="0">
+                      <a:endParaRPr lang="en-US" sz="1000" dirty="0">
                         <a:latin typeface="Calibri" charset="0"/>
                         <a:ea typeface="Calibri" charset="0"/>
                         <a:cs typeface="Calibri" charset="0"/>
@@ -12977,17 +12564,17 @@
                         <a:buNone/>
                       </a:pPr>
                       <a:r>
-                        <a:rPr lang="en-US" sz="1150" dirty="0">
+                        <a:rPr lang="en-US" sz="1000" b="1" dirty="0">
                           <a:solidFill>
-                            <a:srgbClr val="1B2A32"/>
+                            <a:srgbClr val="1E7A46"/>
                           </a:solidFill>
                           <a:latin typeface="Calibri" pitchFamily="34" charset="0"/>
                           <a:ea typeface="Calibri" pitchFamily="34" charset="-122"/>
                           <a:cs typeface="Calibri" pitchFamily="34" charset="-120"/>
                         </a:rPr>
-                        <a:t>$9.400</a:t>
+                        <a:t>$32.760</a:t>
                       </a:r>
-                      <a:endParaRPr lang="en-US" sz="1150" dirty="0">
+                      <a:endParaRPr lang="en-US" sz="1000" dirty="0">
                         <a:latin typeface="Calibri" charset="0"/>
                         <a:ea typeface="Calibri" charset="0"/>
                         <a:cs typeface="Calibri" charset="0"/>
@@ -13042,7 +12629,72 @@
                         <a:buNone/>
                       </a:pPr>
                       <a:r>
-                        <a:rPr lang="en-US" sz="1150" dirty="0">
+                        <a:rPr lang="en-US" sz="1000" dirty="0">
+                          <a:solidFill>
+                            <a:srgbClr val="1B2A32"/>
+                          </a:solidFill>
+                          <a:latin typeface="Calibri" pitchFamily="34" charset="0"/>
+                          <a:ea typeface="Calibri" pitchFamily="34" charset="-122"/>
+                          <a:cs typeface="Calibri" pitchFamily="34" charset="-120"/>
+                        </a:rPr>
+                        <a:t>$9.400</a:t>
+                      </a:r>
+                      <a:endParaRPr lang="en-US" sz="1000" dirty="0">
+                        <a:latin typeface="Calibri" charset="0"/>
+                        <a:ea typeface="Calibri" charset="0"/>
+                        <a:cs typeface="Calibri" charset="0"/>
+                      </a:endParaRPr>
+                    </a:p>
+                  </a:txBody>
+                  <a:tcPr marL="91440" marR="91440" marT="45720" marB="45720" anchor="ctr">
+                    <a:lnL w="9525" cap="flat" cmpd="sng" algn="ctr">
+                      <a:solidFill>
+                        <a:srgbClr val="D5E2E5"/>
+                      </a:solidFill>
+                      <a:prstDash val="solid"/>
+                      <a:round/>
+                      <a:headEnd type="none" w="med" len="med"/>
+                      <a:tailEnd type="none" w="med" len="med"/>
+                    </a:lnL>
+                    <a:lnR w="9525" cap="flat" cmpd="sng" algn="ctr">
+                      <a:solidFill>
+                        <a:srgbClr val="D5E2E5"/>
+                      </a:solidFill>
+                      <a:prstDash val="solid"/>
+                      <a:round/>
+                      <a:headEnd type="none" w="med" len="med"/>
+                      <a:tailEnd type="none" w="med" len="med"/>
+                    </a:lnR>
+                    <a:lnT w="9525" cap="flat" cmpd="sng" algn="ctr">
+                      <a:solidFill>
+                        <a:srgbClr val="D5E2E5"/>
+                      </a:solidFill>
+                      <a:prstDash val="solid"/>
+                      <a:round/>
+                      <a:headEnd type="none" w="med" len="med"/>
+                      <a:tailEnd type="none" w="med" len="med"/>
+                    </a:lnT>
+                    <a:lnB w="9525" cap="flat" cmpd="sng" algn="ctr">
+                      <a:solidFill>
+                        <a:srgbClr val="D5E2E5"/>
+                      </a:solidFill>
+                      <a:prstDash val="solid"/>
+                      <a:round/>
+                      <a:headEnd type="none" w="med" len="med"/>
+                      <a:tailEnd type="none" w="med" len="med"/>
+                    </a:lnB>
+                  </a:tcPr>
+                </a:tc>
+                <a:tc>
+                  <a:txBody>
+                    <a:bodyPr/>
+                    <a:lstStyle/>
+                    <a:p>
+                      <a:pPr algn="ctr" indent="0" marL="0">
+                        <a:buNone/>
+                      </a:pPr>
+                      <a:r>
+                        <a:rPr lang="en-US" sz="1000" dirty="0">
                           <a:solidFill>
                             <a:srgbClr val="1B2A32"/>
                           </a:solidFill>
@@ -13052,7 +12704,7 @@
                         </a:rPr>
                         <a:t>$5.000</a:t>
                       </a:r>
-                      <a:endParaRPr lang="en-US" sz="1150" dirty="0">
+                      <a:endParaRPr lang="en-US" sz="1000" dirty="0">
                         <a:latin typeface="Calibri" charset="0"/>
                         <a:ea typeface="Calibri" charset="0"/>
                         <a:cs typeface="Calibri" charset="0"/>
@@ -13109,7 +12761,7 @@
                         <a:buNone/>
                       </a:pPr>
                       <a:r>
-                        <a:rPr lang="en-US" sz="1150" dirty="0">
+                        <a:rPr lang="en-US" sz="1000" dirty="0">
                           <a:solidFill>
                             <a:srgbClr val="1B2A32"/>
                           </a:solidFill>
@@ -13119,7 +12771,7 @@
                         </a:rPr>
                         <a:t>Media</a:t>
                       </a:r>
-                      <a:endParaRPr lang="en-US" sz="1150" dirty="0">
+                      <a:endParaRPr lang="en-US" sz="1000" dirty="0">
                         <a:latin typeface="Calibri" charset="0"/>
                         <a:ea typeface="Calibri" charset="0"/>
                         <a:cs typeface="Calibri" charset="0"/>
@@ -13174,7 +12826,7 @@
                         <a:buNone/>
                       </a:pPr>
                       <a:r>
-                        <a:rPr lang="en-US" sz="1150" dirty="0">
+                        <a:rPr lang="en-US" sz="1000" dirty="0">
                           <a:solidFill>
                             <a:srgbClr val="1B2A32"/>
                           </a:solidFill>
@@ -13184,7 +12836,7 @@
                         </a:rPr>
                         <a:t>$50.000</a:t>
                       </a:r>
-                      <a:endParaRPr lang="en-US" sz="1150" dirty="0">
+                      <a:endParaRPr lang="en-US" sz="1000" dirty="0">
                         <a:latin typeface="Calibri" charset="0"/>
                         <a:ea typeface="Calibri" charset="0"/>
                         <a:cs typeface="Calibri" charset="0"/>
@@ -13239,17 +12891,17 @@
                         <a:buNone/>
                       </a:pPr>
                       <a:r>
-                        <a:rPr lang="en-US" sz="1150" dirty="0">
+                        <a:rPr lang="en-US" sz="1000" b="1" dirty="0">
                           <a:solidFill>
-                            <a:srgbClr val="1B2A32"/>
+                            <a:srgbClr val="1E7A46"/>
                           </a:solidFill>
                           <a:latin typeface="Calibri" pitchFamily="34" charset="0"/>
                           <a:ea typeface="Calibri" pitchFamily="34" charset="-122"/>
                           <a:cs typeface="Calibri" pitchFamily="34" charset="-120"/>
                         </a:rPr>
-                        <a:t>$13.000</a:t>
+                        <a:t>$39.000</a:t>
                       </a:r>
-                      <a:endParaRPr lang="en-US" sz="1150" dirty="0">
+                      <a:endParaRPr lang="en-US" sz="1000" dirty="0">
                         <a:latin typeface="Calibri" charset="0"/>
                         <a:ea typeface="Calibri" charset="0"/>
                         <a:cs typeface="Calibri" charset="0"/>
@@ -13304,7 +12956,72 @@
                         <a:buNone/>
                       </a:pPr>
                       <a:r>
-                        <a:rPr lang="en-US" sz="1150" dirty="0">
+                        <a:rPr lang="en-US" sz="1000" dirty="0">
+                          <a:solidFill>
+                            <a:srgbClr val="1B2A32"/>
+                          </a:solidFill>
+                          <a:latin typeface="Calibri" pitchFamily="34" charset="0"/>
+                          <a:ea typeface="Calibri" pitchFamily="34" charset="-122"/>
+                          <a:cs typeface="Calibri" pitchFamily="34" charset="-120"/>
+                        </a:rPr>
+                        <a:t>$13.000</a:t>
+                      </a:r>
+                      <a:endParaRPr lang="en-US" sz="1000" dirty="0">
+                        <a:latin typeface="Calibri" charset="0"/>
+                        <a:ea typeface="Calibri" charset="0"/>
+                        <a:cs typeface="Calibri" charset="0"/>
+                      </a:endParaRPr>
+                    </a:p>
+                  </a:txBody>
+                  <a:tcPr marL="91440" marR="91440" marT="45720" marB="45720" anchor="ctr">
+                    <a:lnL w="9525" cap="flat" cmpd="sng" algn="ctr">
+                      <a:solidFill>
+                        <a:srgbClr val="D5E2E5"/>
+                      </a:solidFill>
+                      <a:prstDash val="solid"/>
+                      <a:round/>
+                      <a:headEnd type="none" w="med" len="med"/>
+                      <a:tailEnd type="none" w="med" len="med"/>
+                    </a:lnL>
+                    <a:lnR w="9525" cap="flat" cmpd="sng" algn="ctr">
+                      <a:solidFill>
+                        <a:srgbClr val="D5E2E5"/>
+                      </a:solidFill>
+                      <a:prstDash val="solid"/>
+                      <a:round/>
+                      <a:headEnd type="none" w="med" len="med"/>
+                      <a:tailEnd type="none" w="med" len="med"/>
+                    </a:lnR>
+                    <a:lnT w="9525" cap="flat" cmpd="sng" algn="ctr">
+                      <a:solidFill>
+                        <a:srgbClr val="D5E2E5"/>
+                      </a:solidFill>
+                      <a:prstDash val="solid"/>
+                      <a:round/>
+                      <a:headEnd type="none" w="med" len="med"/>
+                      <a:tailEnd type="none" w="med" len="med"/>
+                    </a:lnT>
+                    <a:lnB w="9525" cap="flat" cmpd="sng" algn="ctr">
+                      <a:solidFill>
+                        <a:srgbClr val="D5E2E5"/>
+                      </a:solidFill>
+                      <a:prstDash val="solid"/>
+                      <a:round/>
+                      <a:headEnd type="none" w="med" len="med"/>
+                      <a:tailEnd type="none" w="med" len="med"/>
+                    </a:lnB>
+                  </a:tcPr>
+                </a:tc>
+                <a:tc>
+                  <a:txBody>
+                    <a:bodyPr/>
+                    <a:lstStyle/>
+                    <a:p>
+                      <a:pPr algn="ctr" indent="0" marL="0">
+                        <a:buNone/>
+                      </a:pPr>
+                      <a:r>
+                        <a:rPr lang="en-US" sz="1000" dirty="0">
                           <a:solidFill>
                             <a:srgbClr val="1B2A32"/>
                           </a:solidFill>
@@ -13314,7 +13031,7 @@
                         </a:rPr>
                         <a:t>$6.000</a:t>
                       </a:r>
-                      <a:endParaRPr lang="en-US" sz="1150" dirty="0">
+                      <a:endParaRPr lang="en-US" sz="1000" dirty="0">
                         <a:latin typeface="Calibri" charset="0"/>
                         <a:ea typeface="Calibri" charset="0"/>
                         <a:cs typeface="Calibri" charset="0"/>
@@ -13371,7 +13088,7 @@
                         <a:buNone/>
                       </a:pPr>
                       <a:r>
-                        <a:rPr lang="en-US" sz="1150" dirty="0">
+                        <a:rPr lang="en-US" sz="1000" dirty="0">
                           <a:solidFill>
                             <a:srgbClr val="1B2A32"/>
                           </a:solidFill>
@@ -13381,7 +13098,7 @@
                         </a:rPr>
                         <a:t>Alta</a:t>
                       </a:r>
-                      <a:endParaRPr lang="en-US" sz="1150" dirty="0">
+                      <a:endParaRPr lang="en-US" sz="1000" dirty="0">
                         <a:latin typeface="Calibri" charset="0"/>
                         <a:ea typeface="Calibri" charset="0"/>
                         <a:cs typeface="Calibri" charset="0"/>
@@ -13436,7 +13153,7 @@
                         <a:buNone/>
                       </a:pPr>
                       <a:r>
-                        <a:rPr lang="en-US" sz="1150" dirty="0">
+                        <a:rPr lang="en-US" sz="1000" dirty="0">
                           <a:solidFill>
                             <a:srgbClr val="1B2A32"/>
                           </a:solidFill>
@@ -13446,7 +13163,7 @@
                         </a:rPr>
                         <a:t>$115.000</a:t>
                       </a:r>
-                      <a:endParaRPr lang="en-US" sz="1150" dirty="0">
+                      <a:endParaRPr lang="en-US" sz="1000" dirty="0">
                         <a:latin typeface="Calibri" charset="0"/>
                         <a:ea typeface="Calibri" charset="0"/>
                         <a:cs typeface="Calibri" charset="0"/>
@@ -13501,17 +13218,17 @@
                         <a:buNone/>
                       </a:pPr>
                       <a:r>
-                        <a:rPr lang="en-US" sz="1150" dirty="0">
+                        <a:rPr lang="en-US" sz="1000" b="1" dirty="0">
                           <a:solidFill>
-                            <a:srgbClr val="1B2A32"/>
+                            <a:srgbClr val="1E7A46"/>
                           </a:solidFill>
                           <a:latin typeface="Calibri" pitchFamily="34" charset="0"/>
                           <a:ea typeface="Calibri" pitchFamily="34" charset="-122"/>
                           <a:cs typeface="Calibri" pitchFamily="34" charset="-120"/>
                         </a:rPr>
-                        <a:t>$17.000</a:t>
+                        <a:t>$89.700</a:t>
                       </a:r>
-                      <a:endParaRPr lang="en-US" sz="1150" dirty="0">
+                      <a:endParaRPr lang="en-US" sz="1000" dirty="0">
                         <a:latin typeface="Calibri" charset="0"/>
                         <a:ea typeface="Calibri" charset="0"/>
                         <a:cs typeface="Calibri" charset="0"/>
@@ -13566,7 +13283,72 @@
                         <a:buNone/>
                       </a:pPr>
                       <a:r>
-                        <a:rPr lang="en-US" sz="1150" dirty="0">
+                        <a:rPr lang="en-US" sz="1000" dirty="0">
+                          <a:solidFill>
+                            <a:srgbClr val="1B2A32"/>
+                          </a:solidFill>
+                          <a:latin typeface="Calibri" pitchFamily="34" charset="0"/>
+                          <a:ea typeface="Calibri" pitchFamily="34" charset="-122"/>
+                          <a:cs typeface="Calibri" pitchFamily="34" charset="-120"/>
+                        </a:rPr>
+                        <a:t>$17.000</a:t>
+                      </a:r>
+                      <a:endParaRPr lang="en-US" sz="1000" dirty="0">
+                        <a:latin typeface="Calibri" charset="0"/>
+                        <a:ea typeface="Calibri" charset="0"/>
+                        <a:cs typeface="Calibri" charset="0"/>
+                      </a:endParaRPr>
+                    </a:p>
+                  </a:txBody>
+                  <a:tcPr marL="91440" marR="91440" marT="45720" marB="45720" anchor="ctr">
+                    <a:lnL w="9525" cap="flat" cmpd="sng" algn="ctr">
+                      <a:solidFill>
+                        <a:srgbClr val="D5E2E5"/>
+                      </a:solidFill>
+                      <a:prstDash val="solid"/>
+                      <a:round/>
+                      <a:headEnd type="none" w="med" len="med"/>
+                      <a:tailEnd type="none" w="med" len="med"/>
+                    </a:lnL>
+                    <a:lnR w="9525" cap="flat" cmpd="sng" algn="ctr">
+                      <a:solidFill>
+                        <a:srgbClr val="D5E2E5"/>
+                      </a:solidFill>
+                      <a:prstDash val="solid"/>
+                      <a:round/>
+                      <a:headEnd type="none" w="med" len="med"/>
+                      <a:tailEnd type="none" w="med" len="med"/>
+                    </a:lnR>
+                    <a:lnT w="9525" cap="flat" cmpd="sng" algn="ctr">
+                      <a:solidFill>
+                        <a:srgbClr val="D5E2E5"/>
+                      </a:solidFill>
+                      <a:prstDash val="solid"/>
+                      <a:round/>
+                      <a:headEnd type="none" w="med" len="med"/>
+                      <a:tailEnd type="none" w="med" len="med"/>
+                    </a:lnT>
+                    <a:lnB w="9525" cap="flat" cmpd="sng" algn="ctr">
+                      <a:solidFill>
+                        <a:srgbClr val="D5E2E5"/>
+                      </a:solidFill>
+                      <a:prstDash val="solid"/>
+                      <a:round/>
+                      <a:headEnd type="none" w="med" len="med"/>
+                      <a:tailEnd type="none" w="med" len="med"/>
+                    </a:lnB>
+                  </a:tcPr>
+                </a:tc>
+                <a:tc>
+                  <a:txBody>
+                    <a:bodyPr/>
+                    <a:lstStyle/>
+                    <a:p>
+                      <a:pPr algn="ctr" indent="0" marL="0">
+                        <a:buNone/>
+                      </a:pPr>
+                      <a:r>
+                        <a:rPr lang="en-US" sz="1000" dirty="0">
                           <a:solidFill>
                             <a:srgbClr val="1B2A32"/>
                           </a:solidFill>
@@ -13576,7 +13358,7 @@
                         </a:rPr>
                         <a:t>$7.000</a:t>
                       </a:r>
-                      <a:endParaRPr lang="en-US" sz="1150" dirty="0">
+                      <a:endParaRPr lang="en-US" sz="1000" dirty="0">
                         <a:latin typeface="Calibri" charset="0"/>
                         <a:ea typeface="Calibri" charset="0"/>
                         <a:cs typeface="Calibri" charset="0"/>
@@ -13636,6 +13418,45 @@
         <p:spPr>
           <a:xfrm>
             <a:off x="457200" y="2880360"/>
+            <a:ext cx="4297680" cy="457200"/>
+          </a:xfrm>
+          <a:prstGeom prst="rect">
+            <a:avLst/>
+          </a:prstGeom>
+          <a:noFill/>
+          <a:ln/>
+        </p:spPr>
+        <p:txBody>
+          <a:bodyPr wrap="square" lIns="0" tIns="0" rIns="0" bIns="0" rtlCol="0" anchor="t"/>
+          <a:lstStyle/>
+          <a:p>
+            <a:pPr indent="0" marL="0">
+              <a:buNone/>
+            </a:pPr>
+            <a:r>
+              <a:rPr lang="en-US" sz="1000" b="1" dirty="0">
+                <a:solidFill>
+                  <a:srgbClr val="1E7A46"/>
+                </a:solidFill>
+                <a:latin typeface="Calibri" pitchFamily="34" charset="0"/>
+                <a:ea typeface="Calibri" pitchFamily="34" charset="-122"/>
+                <a:cs typeface="Calibri" pitchFamily="34" charset="-120"/>
+              </a:rPr>
+              <a:t>El técnico recibe además el 90% del bono y del recargo de fin de semana (Baird captura el 10%).</a:t>
+            </a:r>
+            <a:endParaRPr lang="en-US" sz="1000" dirty="0"/>
+          </a:p>
+        </p:txBody>
+      </p:sp>
+      <p:sp>
+        <p:nvSpPr>
+          <p:cNvPr id="6" name="Text 3"/>
+          <p:cNvSpPr/>
+          <p:nvPr/>
+        </p:nvSpPr>
+        <p:spPr>
+          <a:xfrm>
+            <a:off x="457200" y="3364992"/>
             <a:ext cx="4297680" cy="868680"/>
           </a:xfrm>
           <a:prstGeom prst="rect">
@@ -13652,7 +13473,7 @@
               <a:buNone/>
             </a:pPr>
             <a:r>
-              <a:rPr lang="en-US" sz="1000" dirty="0">
+              <a:rPr lang="en-US" sz="950" dirty="0">
                 <a:solidFill>
                   <a:srgbClr val="5B7078"/>
                 </a:solidFill>
@@ -13662,13 +13483,13 @@
               </a:rPr>
               <a:t>* Bono por resolver en 0–1 día con TA cumplido (diagnóstico &lt; 24 h) y encuesta contestada. Baja a $0 después de 3 días. Sin encuesta: ~50% del bono. El contador pausa mientras se espera repuesto.</a:t>
             </a:r>
-            <a:endParaRPr lang="en-US" sz="1000" dirty="0"/>
-          </a:p>
-        </p:txBody>
-      </p:sp>
-      <p:sp>
-        <p:nvSpPr>
-          <p:cNvPr id="6" name="Shape 3"/>
+            <a:endParaRPr lang="en-US" sz="950" dirty="0"/>
+          </a:p>
+        </p:txBody>
+      </p:sp>
+      <p:sp>
+        <p:nvSpPr>
+          <p:cNvPr id="7" name="Shape 4"/>
           <p:cNvSpPr/>
           <p:nvPr/>
         </p:nvSpPr>
@@ -13702,7 +13523,7 @@
       </p:sp>
       <p:sp>
         <p:nvSpPr>
-          <p:cNvPr id="7" name="Text 4"/>
+          <p:cNvPr id="8" name="Text 5"/>
           <p:cNvSpPr/>
           <p:nvPr/>
         </p:nvSpPr>
@@ -13741,7 +13562,7 @@
       </p:sp>
       <p:sp>
         <p:nvSpPr>
-          <p:cNvPr id="8" name="Text 5"/>
+          <p:cNvPr id="9" name="Text 6"/>
           <p:cNvSpPr/>
           <p:nvPr/>
         </p:nvSpPr>
@@ -13837,7 +13658,7 @@
       </p:sp>
       <p:sp>
         <p:nvSpPr>
-          <p:cNvPr id="9" name="Shape 6"/>
+          <p:cNvPr id="10" name="Shape 7"/>
           <p:cNvSpPr/>
           <p:nvPr/>
         </p:nvSpPr>
@@ -13871,7 +13692,7 @@
       </p:sp>
       <p:sp>
         <p:nvSpPr>
-          <p:cNvPr id="10" name="Text 7"/>
+          <p:cNvPr id="11" name="Text 8"/>
           <p:cNvSpPr/>
           <p:nvPr/>
         </p:nvSpPr>
@@ -13910,7 +13731,7 @@
       </p:sp>
       <p:sp>
         <p:nvSpPr>
-          <p:cNvPr id="11" name="Text 8"/>
+          <p:cNvPr id="12" name="Text 9"/>
           <p:cNvSpPr/>
           <p:nvPr/>
         </p:nvSpPr>
@@ -13949,7 +13770,7 @@
       </p:sp>
       <p:sp>
         <p:nvSpPr>
-          <p:cNvPr id="12" name="Text 9"/>
+          <p:cNvPr id="13" name="Text 10"/>
           <p:cNvSpPr/>
           <p:nvPr/>
         </p:nvSpPr>
@@ -14022,7 +13843,7 @@
       </p:sp>
       <p:sp>
         <p:nvSpPr>
-          <p:cNvPr id="13" name="Shape 10"/>
+          <p:cNvPr id="14" name="Shape 11"/>
           <p:cNvSpPr/>
           <p:nvPr/>
         </p:nvSpPr>
@@ -14056,7 +13877,7 @@
       </p:sp>
       <p:sp>
         <p:nvSpPr>
-          <p:cNvPr id="14" name="Text 11"/>
+          <p:cNvPr id="15" name="Text 12"/>
           <p:cNvSpPr/>
           <p:nvPr/>
         </p:nvSpPr>
@@ -14095,7 +13916,7 @@
       </p:sp>
       <p:sp>
         <p:nvSpPr>
-          <p:cNvPr id="15" name="Text 12"/>
+          <p:cNvPr id="16" name="Text 13"/>
           <p:cNvSpPr/>
           <p:nvPr/>
         </p:nvSpPr>
@@ -14134,7 +13955,7 @@
       </p:sp>
       <p:sp>
         <p:nvSpPr>
-          <p:cNvPr id="16" name="Text 13"/>
+          <p:cNvPr id="17" name="Text 14"/>
           <p:cNvSpPr/>
           <p:nvPr/>
         </p:nvSpPr>
@@ -14207,7 +14028,7 @@
       </p:sp>
       <p:sp>
         <p:nvSpPr>
-          <p:cNvPr id="17" name="Text 14"/>
+          <p:cNvPr id="18" name="Text 15"/>
           <p:cNvSpPr/>
           <p:nvPr/>
         </p:nvSpPr>
